--- a/CV1711-WEEK11.pptx
+++ b/CV1711-WEEK11.pptx
@@ -149,18 +149,18 @@
   <pc:docChgLst>
     <pc:chgData name="#CUI SHUAIWEN#" userId="35a196ea-bcb8-475e-86cf-0b9eaca8a48f" providerId="ADAL" clId="{4D8D382B-DDFF-455F-B5ED-E854E938891F}"/>
     <pc:docChg chg="undo custSel addSld delSld modSld sldOrd">
-      <pc:chgData name="#CUI SHUAIWEN#" userId="35a196ea-bcb8-475e-86cf-0b9eaca8a48f" providerId="ADAL" clId="{4D8D382B-DDFF-455F-B5ED-E854E938891F}" dt="2026-03-31T12:24:33.315" v="1775" actId="47"/>
+      <pc:chgData name="#CUI SHUAIWEN#" userId="35a196ea-bcb8-475e-86cf-0b9eaca8a48f" providerId="ADAL" clId="{4D8D382B-DDFF-455F-B5ED-E854E938891F}" dt="2026-03-31T12:26:48.822" v="1793" actId="1076"/>
       <pc:docMkLst>
         <pc:docMk/>
       </pc:docMkLst>
       <pc:sldChg chg="addSp delSp modSp add mod">
-        <pc:chgData name="#CUI SHUAIWEN#" userId="35a196ea-bcb8-475e-86cf-0b9eaca8a48f" providerId="ADAL" clId="{4D8D382B-DDFF-455F-B5ED-E854E938891F}" dt="2026-03-24T13:48:26.976" v="1250" actId="14100"/>
+        <pc:chgData name="#CUI SHUAIWEN#" userId="35a196ea-bcb8-475e-86cf-0b9eaca8a48f" providerId="ADAL" clId="{4D8D382B-DDFF-455F-B5ED-E854E938891F}" dt="2026-03-31T12:26:48.822" v="1793" actId="1076"/>
         <pc:sldMkLst>
           <pc:docMk/>
           <pc:sldMk cId="2224933946" sldId="304"/>
         </pc:sldMkLst>
         <pc:spChg chg="mod">
-          <ac:chgData name="#CUI SHUAIWEN#" userId="35a196ea-bcb8-475e-86cf-0b9eaca8a48f" providerId="ADAL" clId="{4D8D382B-DDFF-455F-B5ED-E854E938891F}" dt="2026-03-24T13:48:10.316" v="1245" actId="1076"/>
+          <ac:chgData name="#CUI SHUAIWEN#" userId="35a196ea-bcb8-475e-86cf-0b9eaca8a48f" providerId="ADAL" clId="{4D8D382B-DDFF-455F-B5ED-E854E938891F}" dt="2026-03-31T12:26:27.717" v="1782" actId="1076"/>
           <ac:spMkLst>
             <pc:docMk/>
             <pc:sldMk cId="2224933946" sldId="304"/>
@@ -168,7 +168,7 @@
           </ac:spMkLst>
         </pc:spChg>
         <pc:spChg chg="mod">
-          <ac:chgData name="#CUI SHUAIWEN#" userId="35a196ea-bcb8-475e-86cf-0b9eaca8a48f" providerId="ADAL" clId="{4D8D382B-DDFF-455F-B5ED-E854E938891F}" dt="2026-03-24T13:48:14.863" v="1246" actId="1076"/>
+          <ac:chgData name="#CUI SHUAIWEN#" userId="35a196ea-bcb8-475e-86cf-0b9eaca8a48f" providerId="ADAL" clId="{4D8D382B-DDFF-455F-B5ED-E854E938891F}" dt="2026-03-31T12:26:46.737" v="1792" actId="1076"/>
           <ac:spMkLst>
             <pc:docMk/>
             <pc:sldMk cId="2224933946" sldId="304"/>
@@ -176,7 +176,15 @@
           </ac:spMkLst>
         </pc:spChg>
         <pc:picChg chg="add mod ord">
-          <ac:chgData name="#CUI SHUAIWEN#" userId="35a196ea-bcb8-475e-86cf-0b9eaca8a48f" providerId="ADAL" clId="{4D8D382B-DDFF-455F-B5ED-E854E938891F}" dt="2026-03-24T13:48:05.709" v="1244" actId="167"/>
+          <ac:chgData name="#CUI SHUAIWEN#" userId="35a196ea-bcb8-475e-86cf-0b9eaca8a48f" providerId="ADAL" clId="{4D8D382B-DDFF-455F-B5ED-E854E938891F}" dt="2026-03-31T12:26:24.235" v="1781" actId="1076"/>
+          <ac:picMkLst>
+            <pc:docMk/>
+            <pc:sldMk cId="2224933946" sldId="304"/>
+            <ac:picMk id="3" creationId="{3BD4689F-0084-4480-43D2-59F77A69AD47}"/>
+          </ac:picMkLst>
+        </pc:picChg>
+        <pc:picChg chg="add del mod ord">
+          <ac:chgData name="#CUI SHUAIWEN#" userId="35a196ea-bcb8-475e-86cf-0b9eaca8a48f" providerId="ADAL" clId="{4D8D382B-DDFF-455F-B5ED-E854E938891F}" dt="2026-03-31T12:26:18.950" v="1776" actId="478"/>
           <ac:picMkLst>
             <pc:docMk/>
             <pc:sldMk cId="2224933946" sldId="304"/>
@@ -184,7 +192,15 @@
           </ac:picMkLst>
         </pc:picChg>
         <pc:picChg chg="add mod ord">
-          <ac:chgData name="#CUI SHUAIWEN#" userId="35a196ea-bcb8-475e-86cf-0b9eaca8a48f" providerId="ADAL" clId="{4D8D382B-DDFF-455F-B5ED-E854E938891F}" dt="2026-03-24T13:48:05.709" v="1244" actId="167"/>
+          <ac:chgData name="#CUI SHUAIWEN#" userId="35a196ea-bcb8-475e-86cf-0b9eaca8a48f" providerId="ADAL" clId="{4D8D382B-DDFF-455F-B5ED-E854E938891F}" dt="2026-03-31T12:26:43.026" v="1791" actId="167"/>
+          <ac:picMkLst>
+            <pc:docMk/>
+            <pc:sldMk cId="2224933946" sldId="304"/>
+            <ac:picMk id="8" creationId="{6E436360-3DCA-6A1F-B231-8070A29A9603}"/>
+          </ac:picMkLst>
+        </pc:picChg>
+        <pc:picChg chg="add del mod ord">
+          <ac:chgData name="#CUI SHUAIWEN#" userId="35a196ea-bcb8-475e-86cf-0b9eaca8a48f" providerId="ADAL" clId="{4D8D382B-DDFF-455F-B5ED-E854E938891F}" dt="2026-03-31T12:26:31.033" v="1784" actId="478"/>
           <ac:picMkLst>
             <pc:docMk/>
             <pc:sldMk cId="2224933946" sldId="304"/>
@@ -192,7 +208,7 @@
           </ac:picMkLst>
         </pc:picChg>
         <pc:cxnChg chg="mod">
-          <ac:chgData name="#CUI SHUAIWEN#" userId="35a196ea-bcb8-475e-86cf-0b9eaca8a48f" providerId="ADAL" clId="{4D8D382B-DDFF-455F-B5ED-E854E938891F}" dt="2026-03-24T13:48:22.943" v="1249" actId="14100"/>
+          <ac:chgData name="#CUI SHUAIWEN#" userId="35a196ea-bcb8-475e-86cf-0b9eaca8a48f" providerId="ADAL" clId="{4D8D382B-DDFF-455F-B5ED-E854E938891F}" dt="2026-03-31T12:26:29.519" v="1783" actId="1076"/>
           <ac:cxnSpMkLst>
             <pc:docMk/>
             <pc:sldMk cId="2224933946" sldId="304"/>
@@ -200,7 +216,7 @@
           </ac:cxnSpMkLst>
         </pc:cxnChg>
         <pc:cxnChg chg="mod">
-          <ac:chgData name="#CUI SHUAIWEN#" userId="35a196ea-bcb8-475e-86cf-0b9eaca8a48f" providerId="ADAL" clId="{4D8D382B-DDFF-455F-B5ED-E854E938891F}" dt="2026-03-24T13:48:26.976" v="1250" actId="14100"/>
+          <ac:chgData name="#CUI SHUAIWEN#" userId="35a196ea-bcb8-475e-86cf-0b9eaca8a48f" providerId="ADAL" clId="{4D8D382B-DDFF-455F-B5ED-E854E938891F}" dt="2026-03-31T12:26:48.822" v="1793" actId="1076"/>
           <ac:cxnSpMkLst>
             <pc:docMk/>
             <pc:sldMk cId="2224933946" sldId="304"/>
@@ -3776,10 +3792,10 @@
       </p:grpSpPr>
       <p:pic>
         <p:nvPicPr>
-          <p:cNvPr id="5" name="Picture 4">
+          <p:cNvPr id="8" name="Picture 7">
             <a:extLst>
               <a:ext uri="{FF2B5EF4-FFF2-40B4-BE49-F238E27FC236}">
-                <a16:creationId xmlns:a16="http://schemas.microsoft.com/office/drawing/2014/main" id="{4E46DCE2-CB5F-8D91-877D-807D93204613}"/>
+                <a16:creationId xmlns:a16="http://schemas.microsoft.com/office/drawing/2014/main" id="{6E436360-3DCA-6A1F-B231-8070A29A9603}"/>
               </a:ext>
             </a:extLst>
           </p:cNvPr>
@@ -3796,8 +3812,8 @@
         </p:blipFill>
         <p:spPr>
           <a:xfrm>
-            <a:off x="3863860" y="381000"/>
-            <a:ext cx="1891027" cy="4111336"/>
+            <a:off x="6658363" y="564918"/>
+            <a:ext cx="1945193" cy="4229100"/>
           </a:xfrm>
           <a:prstGeom prst="rect">
             <a:avLst/>
@@ -3806,10 +3822,10 @@
       </p:pic>
       <p:pic>
         <p:nvPicPr>
-          <p:cNvPr id="9" name="Picture 8">
+          <p:cNvPr id="3" name="Picture 2">
             <a:extLst>
               <a:ext uri="{FF2B5EF4-FFF2-40B4-BE49-F238E27FC236}">
-                <a16:creationId xmlns:a16="http://schemas.microsoft.com/office/drawing/2014/main" id="{E00F29C7-0BC7-65E3-0FD1-DE6EE087AF04}"/>
+                <a16:creationId xmlns:a16="http://schemas.microsoft.com/office/drawing/2014/main" id="{3BD4689F-0084-4480-43D2-59F77A69AD47}"/>
               </a:ext>
             </a:extLst>
           </p:cNvPr>
@@ -3826,8 +3842,8 @@
         </p:blipFill>
         <p:spPr>
           <a:xfrm>
-            <a:off x="6558240" y="381000"/>
-            <a:ext cx="1891027" cy="4111336"/>
+            <a:off x="3755528" y="564918"/>
+            <a:ext cx="1945193" cy="4229100"/>
           </a:xfrm>
           <a:prstGeom prst="rect">
             <a:avLst/>
@@ -3914,7 +3930,7 @@
         </p:nvSpPr>
         <p:spPr>
           <a:xfrm>
-            <a:off x="3947378" y="3242330"/>
+            <a:off x="3861128" y="3030663"/>
             <a:ext cx="1032701" cy="211667"/>
           </a:xfrm>
           <a:prstGeom prst="roundRect">
@@ -3964,7 +3980,7 @@
         </p:nvSpPr>
         <p:spPr>
           <a:xfrm>
-            <a:off x="7293122" y="1697548"/>
+            <a:off x="7349140" y="3242330"/>
             <a:ext cx="1032701" cy="211667"/>
           </a:xfrm>
           <a:prstGeom prst="roundRect">
@@ -4016,7 +4032,7 @@
         </p:nvCxnSpPr>
         <p:spPr>
           <a:xfrm flipH="1">
-            <a:off x="4999429" y="2978727"/>
+            <a:off x="4915375" y="2671415"/>
             <a:ext cx="327644" cy="359248"/>
           </a:xfrm>
           <a:prstGeom prst="straightConnector1">
@@ -4060,7 +4076,7 @@
         </p:nvCxnSpPr>
         <p:spPr>
           <a:xfrm flipH="1">
-            <a:off x="8153400" y="1524000"/>
+            <a:off x="8267620" y="3030663"/>
             <a:ext cx="228441" cy="173548"/>
           </a:xfrm>
           <a:prstGeom prst="straightConnector1">
@@ -6900,6 +6916,15 @@
 </file>
 
 <file path=customXml/item2.xml><?xml version="1.0" encoding="utf-8"?>
+<p:properties xmlns:p="http://schemas.microsoft.com/office/2006/metadata/properties" xmlns:xsi="http://www.w3.org/2001/XMLSchema-instance" xmlns:pc="http://schemas.microsoft.com/office/infopath/2007/PartnerControls">
+  <documentManagement>
+    <PublishingExpirationDate xmlns="http://schemas.microsoft.com/sharepoint/v3" xsi:nil="true"/>
+    <PublishingStartDate xmlns="http://schemas.microsoft.com/sharepoint/v3" xsi:nil="true"/>
+  </documentManagement>
+</p:properties>
+</file>
+
+<file path=customXml/item3.xml><?xml version="1.0" encoding="utf-8"?>
 <ct:contentTypeSchema xmlns:ct="http://schemas.microsoft.com/office/2006/metadata/contentType" xmlns:ma="http://schemas.microsoft.com/office/2006/metadata/properties/metaAttributes" ct:_="" ma:_="" ma:contentTypeName="Document" ma:contentTypeID="0x010100E28E816AC679FF4C86C22834E825BD05" ma:contentTypeVersion="1" ma:contentTypeDescription="Create a new document." ma:contentTypeScope="" ma:versionID="066e42d507d75a122d0db91dd470f30a">
   <xsd:schema xmlns:xsd="http://www.w3.org/2001/XMLSchema" xmlns:xs="http://www.w3.org/2001/XMLSchema" xmlns:p="http://schemas.microsoft.com/office/2006/metadata/properties" xmlns:ns1="http://schemas.microsoft.com/sharepoint/v3" targetNamespace="http://schemas.microsoft.com/office/2006/metadata/properties" ma:root="true" ma:fieldsID="48c5b5cd9b8d25ff6dd15848836f4270" ns1:_="">
     <xsd:import namespace="http://schemas.microsoft.com/sharepoint/v3"/>
@@ -7031,15 +7056,6 @@
 </ct:contentTypeSchema>
 </file>
 
-<file path=customXml/item3.xml><?xml version="1.0" encoding="utf-8"?>
-<p:properties xmlns:p="http://schemas.microsoft.com/office/2006/metadata/properties" xmlns:xsi="http://www.w3.org/2001/XMLSchema-instance" xmlns:pc="http://schemas.microsoft.com/office/infopath/2007/PartnerControls">
-  <documentManagement>
-    <PublishingExpirationDate xmlns="http://schemas.microsoft.com/sharepoint/v3" xsi:nil="true"/>
-    <PublishingStartDate xmlns="http://schemas.microsoft.com/sharepoint/v3" xsi:nil="true"/>
-  </documentManagement>
-</p:properties>
-</file>
-
 <file path=customXml/itemProps1.xml><?xml version="1.0" encoding="utf-8"?>
 <ds:datastoreItem xmlns:ds="http://schemas.openxmlformats.org/officeDocument/2006/customXml" ds:itemID="{6CCB8030-6F99-446F-BD3B-E5E3F435F1FD}">
   <ds:schemaRefs>
@@ -7049,6 +7065,16 @@
 </file>
 
 <file path=customXml/itemProps2.xml><?xml version="1.0" encoding="utf-8"?>
+<ds:datastoreItem xmlns:ds="http://schemas.openxmlformats.org/officeDocument/2006/customXml" ds:itemID="{264D3FE7-A0C8-4453-A806-BCAD6F53B901}">
+  <ds:schemaRefs>
+    <ds:schemaRef ds:uri="http://schemas.microsoft.com/office/2006/metadata/properties"/>
+    <ds:schemaRef ds:uri="http://schemas.microsoft.com/office/infopath/2007/PartnerControls"/>
+    <ds:schemaRef ds:uri="http://schemas.microsoft.com/sharepoint/v3"/>
+  </ds:schemaRefs>
+</ds:datastoreItem>
+</file>
+
+<file path=customXml/itemProps3.xml><?xml version="1.0" encoding="utf-8"?>
 <ds:datastoreItem xmlns:ds="http://schemas.openxmlformats.org/officeDocument/2006/customXml" ds:itemID="{AFA540F8-4ACB-4DC8-920F-A3CE5A42B988}">
   <ds:schemaRefs>
     <ds:schemaRef ds:uri="http://schemas.microsoft.com/office/2006/metadata/contentType"/>
@@ -7066,16 +7092,6 @@
 </ds:datastoreItem>
 </file>
 
-<file path=customXml/itemProps3.xml><?xml version="1.0" encoding="utf-8"?>
-<ds:datastoreItem xmlns:ds="http://schemas.openxmlformats.org/officeDocument/2006/customXml" ds:itemID="{264D3FE7-A0C8-4453-A806-BCAD6F53B901}">
-  <ds:schemaRefs>
-    <ds:schemaRef ds:uri="http://schemas.microsoft.com/office/2006/metadata/properties"/>
-    <ds:schemaRef ds:uri="http://schemas.microsoft.com/office/infopath/2007/PartnerControls"/>
-    <ds:schemaRef ds:uri="http://schemas.microsoft.com/sharepoint/v3"/>
-  </ds:schemaRefs>
-</ds:datastoreItem>
-</file>
-
 <file path=docMetadata/LabelInfo.xml><?xml version="1.0" encoding="utf-8"?>
 <clbl:labelList xmlns:clbl="http://schemas.microsoft.com/office/2020/mipLabelMetadata">
   <clbl:label id="{15ce9348-be2a-462b-8fc0-e1765a9b204a}" enabled="0" method="" siteId="{15ce9348-be2a-462b-8fc0-e1765a9b204a}" removed="1"/>

--- a/CV1711-WEEK11.pptx
+++ b/CV1711-WEEK11.pptx
@@ -5,7 +5,7 @@
     <p:sldMasterId id="2147483648" r:id="rId4"/>
   </p:sldMasterIdLst>
   <p:handoutMasterIdLst>
-    <p:handoutMasterId r:id="rId16"/>
+    <p:handoutMasterId r:id="rId17"/>
   </p:handoutMasterIdLst>
   <p:sldIdLst>
     <p:sldId id="259" r:id="rId5"/>
@@ -18,7 +18,8 @@
     <p:sldId id="310" r:id="rId12"/>
     <p:sldId id="311" r:id="rId13"/>
     <p:sldId id="312" r:id="rId14"/>
-    <p:sldId id="304" r:id="rId15"/>
+    <p:sldId id="316" r:id="rId15"/>
+    <p:sldId id="304" r:id="rId16"/>
   </p:sldIdLst>
   <p:sldSz cx="9144000" cy="5143500" type="screen16x9"/>
   <p:notesSz cx="6858000" cy="9144000"/>
@@ -139,7 +140,7 @@
 <file path=ppt/revisionInfo.xml><?xml version="1.0" encoding="utf-8"?>
 <p1510:revInfo xmlns:a="http://schemas.openxmlformats.org/drawingml/2006/main" xmlns:r="http://schemas.openxmlformats.org/officeDocument/2006/relationships" xmlns:p1510="http://schemas.microsoft.com/office/powerpoint/2015/10/main">
   <p1510:revLst>
-    <p1510:client id="{61847EC3-0A93-4FD7-A7A4-845E5A6510B8}" v="28" dt="2026-03-31T12:24:22.290"/>
+    <p1510:client id="{61847EC3-0A93-4FD7-A7A4-845E5A6510B8}" v="33" dt="2026-04-01T00:26:52.066"/>
   </p1510:revLst>
 </p1510:revInfo>
 </file>
@@ -149,7 +150,7 @@
   <pc:docChgLst>
     <pc:chgData name="#CUI SHUAIWEN#" userId="35a196ea-bcb8-475e-86cf-0b9eaca8a48f" providerId="ADAL" clId="{4D8D382B-DDFF-455F-B5ED-E854E938891F}"/>
     <pc:docChg chg="undo custSel addSld delSld modSld sldOrd">
-      <pc:chgData name="#CUI SHUAIWEN#" userId="35a196ea-bcb8-475e-86cf-0b9eaca8a48f" providerId="ADAL" clId="{4D8D382B-DDFF-455F-B5ED-E854E938891F}" dt="2026-03-31T12:26:48.822" v="1793" actId="1076"/>
+      <pc:chgData name="#CUI SHUAIWEN#" userId="35a196ea-bcb8-475e-86cf-0b9eaca8a48f" providerId="ADAL" clId="{4D8D382B-DDFF-455F-B5ED-E854E938891F}" dt="2026-04-01T00:27:07.164" v="2043" actId="1076"/>
       <pc:docMkLst>
         <pc:docMk/>
       </pc:docMkLst>
@@ -618,6 +619,61 @@
           </ac:cxnSpMkLst>
         </pc:cxnChg>
       </pc:sldChg>
+      <pc:sldChg chg="addSp delSp modSp add mod">
+        <pc:chgData name="#CUI SHUAIWEN#" userId="35a196ea-bcb8-475e-86cf-0b9eaca8a48f" providerId="ADAL" clId="{4D8D382B-DDFF-455F-B5ED-E854E938891F}" dt="2026-04-01T00:27:07.164" v="2043" actId="1076"/>
+        <pc:sldMkLst>
+          <pc:docMk/>
+          <pc:sldMk cId="783631797" sldId="316"/>
+        </pc:sldMkLst>
+        <pc:spChg chg="del">
+          <ac:chgData name="#CUI SHUAIWEN#" userId="35a196ea-bcb8-475e-86cf-0b9eaca8a48f" providerId="ADAL" clId="{4D8D382B-DDFF-455F-B5ED-E854E938891F}" dt="2026-04-01T00:23:59.229" v="1795" actId="478"/>
+          <ac:spMkLst>
+            <pc:docMk/>
+            <pc:sldMk cId="783631797" sldId="316"/>
+            <ac:spMk id="2" creationId="{611B5B2F-1D53-C663-54CB-D9E549ECB215}"/>
+          </ac:spMkLst>
+        </pc:spChg>
+        <pc:spChg chg="add mod">
+          <ac:chgData name="#CUI SHUAIWEN#" userId="35a196ea-bcb8-475e-86cf-0b9eaca8a48f" providerId="ADAL" clId="{4D8D382B-DDFF-455F-B5ED-E854E938891F}" dt="2026-04-01T00:27:07.164" v="2043" actId="1076"/>
+          <ac:spMkLst>
+            <pc:docMk/>
+            <pc:sldMk cId="783631797" sldId="316"/>
+            <ac:spMk id="3" creationId="{E2689B98-F4C1-B50B-F692-0B00440DC470}"/>
+          </ac:spMkLst>
+        </pc:spChg>
+        <pc:spChg chg="del">
+          <ac:chgData name="#CUI SHUAIWEN#" userId="35a196ea-bcb8-475e-86cf-0b9eaca8a48f" providerId="ADAL" clId="{4D8D382B-DDFF-455F-B5ED-E854E938891F}" dt="2026-04-01T00:23:59.229" v="1795" actId="478"/>
+          <ac:spMkLst>
+            <pc:docMk/>
+            <pc:sldMk cId="783631797" sldId="316"/>
+            <ac:spMk id="4" creationId="{ED6B4261-4E5A-6575-7DC7-E2960A6F6944}"/>
+          </ac:spMkLst>
+        </pc:spChg>
+        <pc:spChg chg="del">
+          <ac:chgData name="#CUI SHUAIWEN#" userId="35a196ea-bcb8-475e-86cf-0b9eaca8a48f" providerId="ADAL" clId="{4D8D382B-DDFF-455F-B5ED-E854E938891F}" dt="2026-04-01T00:23:59.229" v="1795" actId="478"/>
+          <ac:spMkLst>
+            <pc:docMk/>
+            <pc:sldMk cId="783631797" sldId="316"/>
+            <ac:spMk id="5" creationId="{CFA4B977-EB1B-87E0-4ABE-96AAC361A243}"/>
+          </ac:spMkLst>
+        </pc:spChg>
+        <pc:spChg chg="del">
+          <ac:chgData name="#CUI SHUAIWEN#" userId="35a196ea-bcb8-475e-86cf-0b9eaca8a48f" providerId="ADAL" clId="{4D8D382B-DDFF-455F-B5ED-E854E938891F}" dt="2026-04-01T00:23:59.229" v="1795" actId="478"/>
+          <ac:spMkLst>
+            <pc:docMk/>
+            <pc:sldMk cId="783631797" sldId="316"/>
+            <ac:spMk id="8" creationId="{BFFF7D4A-F4D5-73F1-457C-D594ADDFFB51}"/>
+          </ac:spMkLst>
+        </pc:spChg>
+        <pc:picChg chg="del">
+          <ac:chgData name="#CUI SHUAIWEN#" userId="35a196ea-bcb8-475e-86cf-0b9eaca8a48f" providerId="ADAL" clId="{4D8D382B-DDFF-455F-B5ED-E854E938891F}" dt="2026-04-01T00:23:59.723" v="1796" actId="478"/>
+          <ac:picMkLst>
+            <pc:docMk/>
+            <pc:sldMk cId="783631797" sldId="316"/>
+            <ac:picMk id="6" creationId="{BC1CAADA-7D06-5385-2454-D4C95F18AA89}"/>
+          </ac:picMkLst>
+        </pc:picChg>
+      </pc:sldChg>
     </pc:docChg>
   </pc:docChgLst>
 </pc:chgInfo>
@@ -709,7 +765,7 @@
               <a:rPr lang="en-US" smtClean="0">
                 <a:latin typeface="Arial"/>
               </a:rPr>
-              <a:t>3/31/2026</a:t>
+              <a:t>4/1/2026</a:t>
             </a:fld>
             <a:endParaRPr lang="en-US" dirty="0">
               <a:latin typeface="Arial"/>
@@ -979,7 +1035,7 @@
           <a:p>
             <a:fld id="{9F1CC899-6CEC-9548-B06D-7E1EB6F78CA3}" type="datetimeFigureOut">
               <a:rPr lang="en-US" smtClean="0"/>
-              <a:t>3/31/2026</a:t>
+              <a:t>4/1/2026</a:t>
             </a:fld>
             <a:endParaRPr lang="en-US"/>
           </a:p>
@@ -1147,7 +1203,7 @@
           <a:p>
             <a:fld id="{9F1CC899-6CEC-9548-B06D-7E1EB6F78CA3}" type="datetimeFigureOut">
               <a:rPr lang="en-US" smtClean="0"/>
-              <a:t>3/31/2026</a:t>
+              <a:t>4/1/2026</a:t>
             </a:fld>
             <a:endParaRPr lang="en-US"/>
           </a:p>
@@ -1392,7 +1448,7 @@
           <a:p>
             <a:fld id="{9F1CC899-6CEC-9548-B06D-7E1EB6F78CA3}" type="datetimeFigureOut">
               <a:rPr lang="en-US" smtClean="0"/>
-              <a:t>3/31/2026</a:t>
+              <a:t>4/1/2026</a:t>
             </a:fld>
             <a:endParaRPr lang="en-US"/>
           </a:p>
@@ -1677,7 +1733,7 @@
           <a:p>
             <a:fld id="{9F1CC899-6CEC-9548-B06D-7E1EB6F78CA3}" type="datetimeFigureOut">
               <a:rPr lang="en-US" smtClean="0"/>
-              <a:t>3/31/2026</a:t>
+              <a:t>4/1/2026</a:t>
             </a:fld>
             <a:endParaRPr lang="en-US"/>
           </a:p>
@@ -2096,7 +2152,7 @@
           <a:p>
             <a:fld id="{9F1CC899-6CEC-9548-B06D-7E1EB6F78CA3}" type="datetimeFigureOut">
               <a:rPr lang="en-US" smtClean="0"/>
-              <a:t>3/31/2026</a:t>
+              <a:t>4/1/2026</a:t>
             </a:fld>
             <a:endParaRPr lang="en-US"/>
           </a:p>
@@ -2213,7 +2269,7 @@
           <a:p>
             <a:fld id="{9F1CC899-6CEC-9548-B06D-7E1EB6F78CA3}" type="datetimeFigureOut">
               <a:rPr lang="en-US" smtClean="0"/>
-              <a:t>3/31/2026</a:t>
+              <a:t>4/1/2026</a:t>
             </a:fld>
             <a:endParaRPr lang="en-US"/>
           </a:p>
@@ -2308,7 +2364,7 @@
           <a:p>
             <a:fld id="{9F1CC899-6CEC-9548-B06D-7E1EB6F78CA3}" type="datetimeFigureOut">
               <a:rPr lang="en-US" smtClean="0"/>
-              <a:t>3/31/2026</a:t>
+              <a:t>4/1/2026</a:t>
             </a:fld>
             <a:endParaRPr lang="en-US"/>
           </a:p>
@@ -2583,7 +2639,7 @@
           <a:p>
             <a:fld id="{9F1CC899-6CEC-9548-B06D-7E1EB6F78CA3}" type="datetimeFigureOut">
               <a:rPr lang="en-US" smtClean="0"/>
-              <a:t>3/31/2026</a:t>
+              <a:t>4/1/2026</a:t>
             </a:fld>
             <a:endParaRPr lang="en-US"/>
           </a:p>
@@ -2835,7 +2891,7 @@
           <a:p>
             <a:fld id="{9F1CC899-6CEC-9548-B06D-7E1EB6F78CA3}" type="datetimeFigureOut">
               <a:rPr lang="en-US" smtClean="0"/>
-              <a:t>3/31/2026</a:t>
+              <a:t>4/1/2026</a:t>
             </a:fld>
             <a:endParaRPr lang="en-US"/>
           </a:p>
@@ -3048,7 +3104,7 @@
             <a:fld id="{9F1CC899-6CEC-9548-B06D-7E1EB6F78CA3}" type="datetimeFigureOut">
               <a:rPr lang="en-US" smtClean="0"/>
               <a:pPr/>
-              <a:t>3/31/2026</a:t>
+              <a:t>4/1/2026</a:t>
             </a:fld>
             <a:endParaRPr lang="en-US" dirty="0"/>
           </a:p>
@@ -3768,6 +3824,116 @@
 </file>
 
 <file path=ppt/slides/slide11.xml><?xml version="1.0" encoding="utf-8"?>
+<p:sld xmlns:a="http://schemas.openxmlformats.org/drawingml/2006/main" xmlns:r="http://schemas.openxmlformats.org/officeDocument/2006/relationships" xmlns:p="http://schemas.openxmlformats.org/presentationml/2006/main">
+  <p:cSld>
+    <p:spTree>
+      <p:nvGrpSpPr>
+        <p:cNvPr id="1" name="">
+          <a:extLst>
+            <a:ext uri="{FF2B5EF4-FFF2-40B4-BE49-F238E27FC236}">
+              <a16:creationId xmlns:a16="http://schemas.microsoft.com/office/drawing/2014/main" id="{FB5439B5-DC5E-24DE-9811-45C96AE7CF95}"/>
+            </a:ext>
+          </a:extLst>
+        </p:cNvPr>
+        <p:cNvGrpSpPr/>
+        <p:nvPr/>
+      </p:nvGrpSpPr>
+      <p:grpSpPr>
+        <a:xfrm>
+          <a:off x="0" y="0"/>
+          <a:ext cx="0" cy="0"/>
+          <a:chOff x="0" y="0"/>
+          <a:chExt cx="0" cy="0"/>
+        </a:xfrm>
+      </p:grpSpPr>
+      <p:sp>
+        <p:nvSpPr>
+          <p:cNvPr id="3" name="TextBox 2">
+            <a:extLst>
+              <a:ext uri="{FF2B5EF4-FFF2-40B4-BE49-F238E27FC236}">
+                <a16:creationId xmlns:a16="http://schemas.microsoft.com/office/drawing/2014/main" id="{E2689B98-F4C1-B50B-F692-0B00440DC470}"/>
+              </a:ext>
+            </a:extLst>
+          </p:cNvPr>
+          <p:cNvSpPr txBox="1"/>
+          <p:nvPr/>
+        </p:nvSpPr>
+        <p:spPr>
+          <a:xfrm>
+            <a:off x="847376" y="862980"/>
+            <a:ext cx="7621595" cy="2784737"/>
+          </a:xfrm>
+          <a:prstGeom prst="rect">
+            <a:avLst/>
+          </a:prstGeom>
+          <a:noFill/>
+        </p:spPr>
+        <p:txBody>
+          <a:bodyPr wrap="square" rtlCol="0">
+            <a:spAutoFit/>
+          </a:bodyPr>
+          <a:lstStyle/>
+          <a:p>
+            <a:pPr>
+              <a:lnSpc>
+                <a:spcPct val="200000"/>
+              </a:lnSpc>
+            </a:pPr>
+            <a:r>
+              <a:rPr lang="en-US" dirty="0">
+                <a:solidFill>
+                  <a:srgbClr val="FF0000"/>
+                </a:solidFill>
+              </a:rPr>
+              <a:t>NOTE: Week 12 (next week) will be home-based learning and there are no assignments. </a:t>
+            </a:r>
+          </a:p>
+          <a:p>
+            <a:pPr>
+              <a:lnSpc>
+                <a:spcPct val="200000"/>
+              </a:lnSpc>
+            </a:pPr>
+            <a:r>
+              <a:rPr lang="en-US" dirty="0">
+                <a:solidFill>
+                  <a:srgbClr val="FF0000"/>
+                </a:solidFill>
+              </a:rPr>
+              <a:t>You may review the materials and work on exercises at home to prepare for Quiz 2 in Week 13. </a:t>
+            </a:r>
+          </a:p>
+          <a:p>
+            <a:pPr>
+              <a:lnSpc>
+                <a:spcPct val="200000"/>
+              </a:lnSpc>
+            </a:pPr>
+            <a:r>
+              <a:rPr lang="en-US" dirty="0">
+                <a:solidFill>
+                  <a:srgbClr val="FF0000"/>
+                </a:solidFill>
+              </a:rPr>
+              <a:t>If you wish, you are also welcome to come to the EST Lab for practice.</a:t>
+            </a:r>
+          </a:p>
+        </p:txBody>
+      </p:sp>
+    </p:spTree>
+    <p:extLst>
+      <p:ext uri="{BB962C8B-B14F-4D97-AF65-F5344CB8AC3E}">
+        <p14:creationId xmlns:p14="http://schemas.microsoft.com/office/powerpoint/2010/main" val="783631797"/>
+      </p:ext>
+    </p:extLst>
+  </p:cSld>
+  <p:clrMapOvr>
+    <a:masterClrMapping/>
+  </p:clrMapOvr>
+</p:sld>
+</file>
+
+<file path=ppt/slides/slide12.xml><?xml version="1.0" encoding="utf-8"?>
 <p:sld xmlns:a="http://schemas.openxmlformats.org/drawingml/2006/main" xmlns:r="http://schemas.openxmlformats.org/officeDocument/2006/relationships" xmlns:p="http://schemas.openxmlformats.org/presentationml/2006/main">
   <p:cSld>
     <p:spTree>
@@ -6916,15 +7082,6 @@
 </file>
 
 <file path=customXml/item2.xml><?xml version="1.0" encoding="utf-8"?>
-<p:properties xmlns:p="http://schemas.microsoft.com/office/2006/metadata/properties" xmlns:xsi="http://www.w3.org/2001/XMLSchema-instance" xmlns:pc="http://schemas.microsoft.com/office/infopath/2007/PartnerControls">
-  <documentManagement>
-    <PublishingExpirationDate xmlns="http://schemas.microsoft.com/sharepoint/v3" xsi:nil="true"/>
-    <PublishingStartDate xmlns="http://schemas.microsoft.com/sharepoint/v3" xsi:nil="true"/>
-  </documentManagement>
-</p:properties>
-</file>
-
-<file path=customXml/item3.xml><?xml version="1.0" encoding="utf-8"?>
 <ct:contentTypeSchema xmlns:ct="http://schemas.microsoft.com/office/2006/metadata/contentType" xmlns:ma="http://schemas.microsoft.com/office/2006/metadata/properties/metaAttributes" ct:_="" ma:_="" ma:contentTypeName="Document" ma:contentTypeID="0x010100E28E816AC679FF4C86C22834E825BD05" ma:contentTypeVersion="1" ma:contentTypeDescription="Create a new document." ma:contentTypeScope="" ma:versionID="066e42d507d75a122d0db91dd470f30a">
   <xsd:schema xmlns:xsd="http://www.w3.org/2001/XMLSchema" xmlns:xs="http://www.w3.org/2001/XMLSchema" xmlns:p="http://schemas.microsoft.com/office/2006/metadata/properties" xmlns:ns1="http://schemas.microsoft.com/sharepoint/v3" targetNamespace="http://schemas.microsoft.com/office/2006/metadata/properties" ma:root="true" ma:fieldsID="48c5b5cd9b8d25ff6dd15848836f4270" ns1:_="">
     <xsd:import namespace="http://schemas.microsoft.com/sharepoint/v3"/>
@@ -7056,6 +7213,15 @@
 </ct:contentTypeSchema>
 </file>
 
+<file path=customXml/item3.xml><?xml version="1.0" encoding="utf-8"?>
+<p:properties xmlns:p="http://schemas.microsoft.com/office/2006/metadata/properties" xmlns:xsi="http://www.w3.org/2001/XMLSchema-instance" xmlns:pc="http://schemas.microsoft.com/office/infopath/2007/PartnerControls">
+  <documentManagement>
+    <PublishingExpirationDate xmlns="http://schemas.microsoft.com/sharepoint/v3" xsi:nil="true"/>
+    <PublishingStartDate xmlns="http://schemas.microsoft.com/sharepoint/v3" xsi:nil="true"/>
+  </documentManagement>
+</p:properties>
+</file>
+
 <file path=customXml/itemProps1.xml><?xml version="1.0" encoding="utf-8"?>
 <ds:datastoreItem xmlns:ds="http://schemas.openxmlformats.org/officeDocument/2006/customXml" ds:itemID="{6CCB8030-6F99-446F-BD3B-E5E3F435F1FD}">
   <ds:schemaRefs>
@@ -7065,16 +7231,6 @@
 </file>
 
 <file path=customXml/itemProps2.xml><?xml version="1.0" encoding="utf-8"?>
-<ds:datastoreItem xmlns:ds="http://schemas.openxmlformats.org/officeDocument/2006/customXml" ds:itemID="{264D3FE7-A0C8-4453-A806-BCAD6F53B901}">
-  <ds:schemaRefs>
-    <ds:schemaRef ds:uri="http://schemas.microsoft.com/office/2006/metadata/properties"/>
-    <ds:schemaRef ds:uri="http://schemas.microsoft.com/office/infopath/2007/PartnerControls"/>
-    <ds:schemaRef ds:uri="http://schemas.microsoft.com/sharepoint/v3"/>
-  </ds:schemaRefs>
-</ds:datastoreItem>
-</file>
-
-<file path=customXml/itemProps3.xml><?xml version="1.0" encoding="utf-8"?>
 <ds:datastoreItem xmlns:ds="http://schemas.openxmlformats.org/officeDocument/2006/customXml" ds:itemID="{AFA540F8-4ACB-4DC8-920F-A3CE5A42B988}">
   <ds:schemaRefs>
     <ds:schemaRef ds:uri="http://schemas.microsoft.com/office/2006/metadata/contentType"/>
@@ -7092,6 +7248,16 @@
 </ds:datastoreItem>
 </file>
 
+<file path=customXml/itemProps3.xml><?xml version="1.0" encoding="utf-8"?>
+<ds:datastoreItem xmlns:ds="http://schemas.openxmlformats.org/officeDocument/2006/customXml" ds:itemID="{264D3FE7-A0C8-4453-A806-BCAD6F53B901}">
+  <ds:schemaRefs>
+    <ds:schemaRef ds:uri="http://schemas.microsoft.com/office/2006/metadata/properties"/>
+    <ds:schemaRef ds:uri="http://schemas.microsoft.com/office/infopath/2007/PartnerControls"/>
+    <ds:schemaRef ds:uri="http://schemas.microsoft.com/sharepoint/v3"/>
+  </ds:schemaRefs>
+</ds:datastoreItem>
+</file>
+
 <file path=docMetadata/LabelInfo.xml><?xml version="1.0" encoding="utf-8"?>
 <clbl:labelList xmlns:clbl="http://schemas.microsoft.com/office/2020/mipLabelMetadata">
   <clbl:label id="{15ce9348-be2a-462b-8fc0-e1765a9b204a}" enabled="0" method="" siteId="{15ce9348-be2a-462b-8fc0-e1765a9b204a}" removed="1"/>
